--- a/slides/Week8.pptx
+++ b/slides/Week8.pptx
@@ -233,7 +233,7 @@
   <pc:docChgLst>
     <pc:chgData name="Zhao Jin" userId="cd05a825-544c-438a-9ba1-08e63db50b47" providerId="ADAL" clId="{5DF3A229-1965-414E-AF54-F4C37AC7DF68}"/>
     <pc:docChg chg="undo custSel addSld delSld modSld">
-      <pc:chgData name="Zhao Jin" userId="cd05a825-544c-438a-9ba1-08e63db50b47" providerId="ADAL" clId="{5DF3A229-1965-414E-AF54-F4C37AC7DF68}" dt="2026-03-10T01:42:07.535" v="344"/>
+      <pc:chgData name="Zhao Jin" userId="cd05a825-544c-438a-9ba1-08e63db50b47" providerId="ADAL" clId="{5DF3A229-1965-414E-AF54-F4C37AC7DF68}" dt="2026-03-10T04:59:27.792" v="360" actId="20577"/>
       <pc:docMkLst>
         <pc:docMk/>
       </pc:docMkLst>
@@ -467,6 +467,51 @@
             <pc:docMk/>
             <pc:sldMk cId="3269496185" sldId="645"/>
             <ac:spMk id="10" creationId="{53EAFDBE-C17B-4636-95FE-68AA5070A437}"/>
+          </ac:spMkLst>
+        </pc:spChg>
+      </pc:sldChg>
+      <pc:sldChg chg="modSp mod">
+        <pc:chgData name="Zhao Jin" userId="cd05a825-544c-438a-9ba1-08e63db50b47" providerId="ADAL" clId="{5DF3A229-1965-414E-AF54-F4C37AC7DF68}" dt="2026-03-10T04:58:58.219" v="349" actId="207"/>
+        <pc:sldMkLst>
+          <pc:docMk/>
+          <pc:sldMk cId="3772712696" sldId="659"/>
+        </pc:sldMkLst>
+        <pc:spChg chg="mod">
+          <ac:chgData name="Zhao Jin" userId="cd05a825-544c-438a-9ba1-08e63db50b47" providerId="ADAL" clId="{5DF3A229-1965-414E-AF54-F4C37AC7DF68}" dt="2026-03-10T04:58:58.219" v="349" actId="207"/>
+          <ac:spMkLst>
+            <pc:docMk/>
+            <pc:sldMk cId="3772712696" sldId="659"/>
+            <ac:spMk id="11" creationId="{00000000-0000-0000-0000-000000000000}"/>
+          </ac:spMkLst>
+        </pc:spChg>
+      </pc:sldChg>
+      <pc:sldChg chg="modSp mod">
+        <pc:chgData name="Zhao Jin" userId="cd05a825-544c-438a-9ba1-08e63db50b47" providerId="ADAL" clId="{5DF3A229-1965-414E-AF54-F4C37AC7DF68}" dt="2026-03-10T04:59:16.138" v="354" actId="207"/>
+        <pc:sldMkLst>
+          <pc:docMk/>
+          <pc:sldMk cId="783540612" sldId="661"/>
+        </pc:sldMkLst>
+        <pc:spChg chg="mod">
+          <ac:chgData name="Zhao Jin" userId="cd05a825-544c-438a-9ba1-08e63db50b47" providerId="ADAL" clId="{5DF3A229-1965-414E-AF54-F4C37AC7DF68}" dt="2026-03-10T04:59:16.138" v="354" actId="207"/>
+          <ac:spMkLst>
+            <pc:docMk/>
+            <pc:sldMk cId="783540612" sldId="661"/>
+            <ac:spMk id="33" creationId="{00000000-0000-0000-0000-000000000000}"/>
+          </ac:spMkLst>
+        </pc:spChg>
+      </pc:sldChg>
+      <pc:sldChg chg="modSp mod">
+        <pc:chgData name="Zhao Jin" userId="cd05a825-544c-438a-9ba1-08e63db50b47" providerId="ADAL" clId="{5DF3A229-1965-414E-AF54-F4C37AC7DF68}" dt="2026-03-10T04:59:27.792" v="360" actId="20577"/>
+        <pc:sldMkLst>
+          <pc:docMk/>
+          <pc:sldMk cId="1856385546" sldId="662"/>
+        </pc:sldMkLst>
+        <pc:spChg chg="mod">
+          <ac:chgData name="Zhao Jin" userId="cd05a825-544c-438a-9ba1-08e63db50b47" providerId="ADAL" clId="{5DF3A229-1965-414E-AF54-F4C37AC7DF68}" dt="2026-03-10T04:59:27.792" v="360" actId="20577"/>
+          <ac:spMkLst>
+            <pc:docMk/>
+            <pc:sldMk cId="1856385546" sldId="662"/>
+            <ac:spMk id="33" creationId="{00000000-0000-0000-0000-000000000000}"/>
           </ac:spMkLst>
         </pc:spChg>
       </pc:sldChg>
@@ -15433,7 +15478,24 @@
                 <a:latin typeface="Courier New" pitchFamily="49" charset="0"/>
                 <a:cs typeface="Courier New" pitchFamily="49" charset="0"/>
               </a:rPr>
-              <a:t> main() {</a:t>
+              <a:t> main(</a:t>
+            </a:r>
+            <a:r>
+              <a:rPr lang="en-US" b="1" dirty="0">
+                <a:solidFill>
+                  <a:srgbClr val="0000FF"/>
+                </a:solidFill>
+                <a:latin typeface="Courier New" pitchFamily="49" charset="0"/>
+                <a:cs typeface="Courier New" pitchFamily="49" charset="0"/>
+              </a:rPr>
+              <a:t>void</a:t>
+            </a:r>
+            <a:r>
+              <a:rPr lang="en-US" b="1" dirty="0">
+                <a:latin typeface="Courier New" pitchFamily="49" charset="0"/>
+                <a:cs typeface="Courier New" pitchFamily="49" charset="0"/>
+              </a:rPr>
+              <a:t>) {</a:t>
             </a:r>
           </a:p>
           <a:p>
@@ -16951,7 +17013,24 @@
                 <a:latin typeface="Courier New" pitchFamily="49" charset="0"/>
                 <a:cs typeface="Courier New" pitchFamily="49" charset="0"/>
               </a:rPr>
-              <a:t> main() {</a:t>
+              <a:t> main(</a:t>
+            </a:r>
+            <a:r>
+              <a:rPr lang="en-US" sz="2000" b="1" dirty="0">
+                <a:solidFill>
+                  <a:srgbClr val="0000FF"/>
+                </a:solidFill>
+                <a:latin typeface="Courier New" pitchFamily="49" charset="0"/>
+                <a:cs typeface="Courier New" pitchFamily="49" charset="0"/>
+              </a:rPr>
+              <a:t>void</a:t>
+            </a:r>
+            <a:r>
+              <a:rPr lang="en-US" sz="2000" b="1" dirty="0">
+                <a:latin typeface="Courier New" pitchFamily="49" charset="0"/>
+                <a:cs typeface="Courier New" pitchFamily="49" charset="0"/>
+              </a:rPr>
+              <a:t>) {</a:t>
             </a:r>
           </a:p>
           <a:p>
@@ -19462,7 +19541,24 @@
                 <a:latin typeface="Courier New" pitchFamily="49" charset="0"/>
                 <a:cs typeface="Courier New" pitchFamily="49" charset="0"/>
               </a:rPr>
-              <a:t> main() {</a:t>
+              <a:t> main(</a:t>
+            </a:r>
+            <a:r>
+              <a:rPr lang="en-US" sz="2000" b="1" dirty="0">
+                <a:solidFill>
+                  <a:srgbClr val="0000FF"/>
+                </a:solidFill>
+                <a:latin typeface="Courier New" pitchFamily="49" charset="0"/>
+                <a:cs typeface="Courier New" pitchFamily="49" charset="0"/>
+              </a:rPr>
+              <a:t>void</a:t>
+            </a:r>
+            <a:r>
+              <a:rPr lang="en-US" sz="2000" b="1" dirty="0">
+                <a:latin typeface="Courier New" pitchFamily="49" charset="0"/>
+                <a:cs typeface="Courier New" pitchFamily="49" charset="0"/>
+              </a:rPr>
+              <a:t>) {</a:t>
             </a:r>
           </a:p>
           <a:p>
@@ -19606,42 +19702,15 @@
               <a:t> long </a:t>
             </a:r>
             <a:r>
-              <a:rPr lang="de-DE" sz="2000" b="1" dirty="0" err="1">
+              <a:rPr lang="de-DE" sz="2000" b="1" dirty="0">
                 <a:solidFill>
                   <a:schemeClr val="tx1"/>
                 </a:solidFill>
                 <a:latin typeface="Courier New" pitchFamily="49" charset="0"/>
                 <a:cs typeface="Courier New" pitchFamily="49" charset="0"/>
               </a:rPr>
-              <a:t>max</a:t>
-            </a:r>
-            <a:r>
-              <a:rPr lang="de-DE" sz="2000" b="1" err="1">
-                <a:solidFill>
-                  <a:schemeClr val="tx1"/>
-                </a:solidFill>
-                <a:latin typeface="Courier New" pitchFamily="49" charset="0"/>
-                <a:cs typeface="Courier New" pitchFamily="49" charset="0"/>
-              </a:rPr>
-              <a:t>_</a:t>
-            </a:r>
-            <a:r>
-              <a:rPr lang="de-DE" sz="2000" b="1">
-                <a:solidFill>
-                  <a:schemeClr val="tx1"/>
-                </a:solidFill>
-                <a:latin typeface="Courier New" pitchFamily="49" charset="0"/>
-                <a:cs typeface="Courier New" pitchFamily="49" charset="0"/>
-              </a:rPr>
-              <a:t>n;</a:t>
-            </a:r>
-            <a:endParaRPr lang="de-DE" sz="2000" b="1" dirty="0">
-              <a:solidFill>
-                <a:schemeClr val="tx1"/>
-              </a:solidFill>
-              <a:latin typeface="Courier New" pitchFamily="49" charset="0"/>
-              <a:cs typeface="Courier New" pitchFamily="49" charset="0"/>
-            </a:endParaRPr>
+              <a:t>max_n;</a:t>
+            </a:r>
           </a:p>
           <a:p>
             <a:pPr>
